--- a/mmrag/fig_mm_v3_arch.pptx
+++ b/mmrag/fig_mm_v3_arch.pptx
@@ -3459,7 +3459,18 @@
                   <a:srgbClr val="222222"/>
                 </a:solidFill>
               </a:rPr>
-              <a:t>FROZEN backbone</a:t>
+              <a:t>backbone weights FROZEN</a:t>
+            </a:r>
+          </a:p>
+          <a:p>
+            <a:pPr algn="ctr"/>
+            <a:r>
+              <a:rPr sz="950" b="0">
+                <a:solidFill>
+                  <a:srgbClr val="222222"/>
+                </a:solidFill>
+              </a:rPr>
+              <a:t>(grads pass through it)</a:t>
             </a:r>
           </a:p>
           <a:p>
@@ -3492,7 +3503,7 @@
                   <a:srgbClr val="222222"/>
                 </a:solidFill>
               </a:rPr>
-              <a:t>the only trained weights</a:t>
+              <a:t>the only weights updated</a:t>
             </a:r>
           </a:p>
           <a:p>
@@ -3855,7 +3866,7 @@
                   <a:srgbClr val="222222"/>
                 </a:solidFill>
               </a:rPr>
-              <a:t>frozen Qwen2.5-VL-3B</a:t>
+              <a:t>Qwen2.5-VL-3B</a:t>
             </a:r>
           </a:p>
           <a:p>
@@ -3866,7 +3877,7 @@
                   <a:srgbClr val="222222"/>
                 </a:solidFill>
               </a:rPr>
-              <a:t>scores each UNIQUE passage</a:t>
+              <a:t>FROZEN — inference only,</a:t>
             </a:r>
           </a:p>
           <a:p>
@@ -3877,7 +3888,40 @@
                   <a:srgbClr val="222222"/>
                 </a:solidFill>
               </a:rPr>
-              <a:t>of the G×k = 16 sampled</a:t>
+              <a:t>no gradients at all</a:t>
+            </a:r>
+          </a:p>
+          <a:p>
+            <a:pPr algn="ctr"/>
+            <a:r>
+              <a:rPr sz="950" b="0">
+                <a:solidFill>
+                  <a:srgbClr val="222222"/>
+                </a:solidFill>
+              </a:rPr>
+              <a:t/>
+            </a:r>
+          </a:p>
+          <a:p>
+            <a:pPr algn="ctr"/>
+            <a:r>
+              <a:rPr sz="950" b="0">
+                <a:solidFill>
+                  <a:srgbClr val="222222"/>
+                </a:solidFill>
+              </a:rPr>
+              <a:t>scores each UNIQUE of</a:t>
+            </a:r>
+          </a:p>
+          <a:p>
+            <a:pPr algn="ctr"/>
+            <a:r>
+              <a:rPr sz="950" b="0">
+                <a:solidFill>
+                  <a:srgbClr val="222222"/>
+                </a:solidFill>
+              </a:rPr>
+              <a:t>the G×k = 16 sampled</a:t>
             </a:r>
           </a:p>
           <a:p>
